--- a/7_KI-Basismodule/KI-B4/KI-B4.1.1_Einstiegsimpuls.pptx
+++ b/7_KI-Basismodule/KI-B4/KI-B4.1.1_Einstiegsimpuls.pptx
@@ -6339,7 +6339,7 @@
         </p:nvSpPr>
         <p:spPr>
           <a:xfrm>
-            <a:off x="311700" y="154850"/>
+            <a:off x="311700" y="0"/>
             <a:ext cx="8520600" cy="4800600"/>
           </a:xfrm>
           <a:prstGeom prst="rect">
@@ -6473,21 +6473,8 @@
                   <a:srgbClr val="000000"/>
                 </a:solidFill>
               </a:rPr>
-              <a:t>Schwangere kaufen größere Mengen unparfürmierter Cremes als Nichtschwangere. Schwangere kaufen Nahrungsergänzungsmittel wie Kalzium, Magnesium oder Zink. Sie kaufen unparfümierte Seife, Wattebäusche, Händedesinfektionsmittel und Feuchttücher. Target [...] hat in seinen Daten ungefähr 25 Produkte identifiziert, die zusammengenommen erlauben, Schwangere [zu identifizieren] und damit entsprechende Werbung zu verschicken, lange bevor der künftige Großvater weiß, dass er Enkel </a:t>
+              <a:t>Schwangere kaufen größere Mengen unparfürmierter Cremes als Nichtschwangere. Schwangere kaufen Nahrungsergänzungsmittel wie Kalzium, Magnesium oder Zink. Sie kaufen unparfümierte Seife, Wattebäusche, Händedesinfektionsmittel und Feuchttücher. Target [...] hat in seinen Daten ungefähr 25 Produkte identifiziert, die zusammengenommen erlauben, Schwangere [zu identifizieren] und damit entsprechende Werbung zu verschicken, lange bevor der künftige Großvater weiß, dass er Enkel bekommt.</a:t>
             </a:r>
-            <a:r>
-              <a:rPr lang="de" sz="1000">
-                <a:solidFill>
-                  <a:srgbClr val="000000"/>
-                </a:solidFill>
-              </a:rPr>
-              <a:t>bekommt.</a:t>
-            </a:r>
-            <a:endParaRPr lang="de" sz="1000" dirty="0">
-              <a:solidFill>
-                <a:srgbClr val="000000"/>
-              </a:solidFill>
-            </a:endParaRPr>
           </a:p>
           <a:p>
             <a:pPr marL="0" lvl="0" indent="0" algn="l" rtl="0">
@@ -6499,21 +6486,13 @@
               </a:spcAft>
               <a:buNone/>
             </a:pPr>
-            <a:r>
-              <a:rPr lang="de" sz="1000">
-                <a:solidFill>
-                  <a:schemeClr val="dk1"/>
-                </a:solidFill>
-              </a:rPr>
-              <a:t>Netzpolitik</a:t>
-            </a:r>
             <a:r>
               <a:rPr lang="de" sz="1000" dirty="0">
                 <a:solidFill>
                   <a:schemeClr val="dk1"/>
                 </a:solidFill>
               </a:rPr>
-              <a:t>.org, 25.07.2014  	Verfügbar unter: https://netzpolitik.org/2014/algorithmen-allmaechtig-freiheit-in-den-zeiten-der-statistik/</a:t>
+              <a:t>Netzpolitik.org, 25.07.2014  	Verfügbar unter: https://netzpolitik.org/2014/algorithmen-allmaechtig-freiheit-in-den-zeiten-der-statistik/</a:t>
             </a:r>
             <a:endParaRPr sz="1000" dirty="0">
               <a:solidFill>
